--- a/dist/초4/수학/수와연산/초4_수학_수와연산_02_억과조_학생용.pptx
+++ b/dist/초4/수학/수와연산/초4_수학_수와연산_02_억과조_학생용.pptx
@@ -121,13 +121,13 @@
   <p:extLst>
     <p:ext uri="{521415D9-36F7-43E2-AB2F-B90AF26B5E84}">
       <p14:sectionLst xmlns:p14="http://schemas.microsoft.com/office/powerpoint/2010/main">
-        <p14:section name="도입" id="{de92f700-cf1b-47db-7bd9-fe8b3cc68293}">
+        <p14:section name="도입" id="{a5530808-18ad-641c-4624-6e3fd85726ca}">
           <p14:sldIdLst>
             <p14:sldId id="256"/>
             <p14:sldId id="257"/>
           </p14:sldIdLst>
         </p14:section>
-        <p14:section name="개념" id="{3a062ec7-6e7a-1d0d-4fac-9a7ed9188c44}">
+        <p14:section name="개념" id="{edaefe5d-6eb3-3b85-b000-72400f66d545}">
           <p14:sldIdLst>
             <p14:sldId id="258"/>
             <p14:sldId id="259"/>
@@ -137,31 +137,31 @@
             <p14:sldId id="265"/>
           </p14:sldIdLst>
         </p14:section>
-        <p14:section name="연습" id="{7daf5198-97b4-f717-d328-37ca7ac3d615}">
+        <p14:section name="연습" id="{ab76ba20-26e5-1e38-e98e-d69c481ef6db}">
           <p14:sldIdLst>
             <p14:sldId id="262"/>
             <p14:sldId id="263"/>
             <p14:sldId id="266"/>
           </p14:sldIdLst>
         </p14:section>
-        <p14:section name="개념" id="{0d72c9d3-d0d3-ddd9-67f5-4503002a5fcc}">
+        <p14:section name="개념" id="{406312db-a79e-dde7-d6e5-fb2981cf238a}">
           <p14:sldIdLst/>
         </p14:section>
-        <p14:section name="연습" id="{76d66bea-4af5-ede5-c4ac-e48916acce31}">
+        <p14:section name="연습" id="{60f1b5a8-4f99-0c85-4c50-dd2b6cdabe02}">
           <p14:sldIdLst/>
         </p14:section>
-        <p14:section name="확인" id="{ec16d1a0-64d8-91de-c89b-8d0b91417d7f}">
+        <p14:section name="확인" id="{011f7e44-618a-1cce-26e1-fd44c00f894b}">
           <p14:sldIdLst>
             <p14:sldId id="267"/>
             <p14:sldId id="268"/>
           </p14:sldIdLst>
         </p14:section>
-        <p14:section name="정리" id="{0dfa5d76-8557-7a85-4653-71db18665be6}">
+        <p14:section name="정리" id="{43761d7b-a234-9471-f708-212ebb6c1ba0}">
           <p14:sldIdLst>
             <p14:sldId id="269"/>
           </p14:sldIdLst>
         </p14:section>
-        <p14:section name="보충" id="{45118976-bfd1-f769-a71a-fb3a039d6ed9}">
+        <p14:section name="보충" id="{7bd2c174-bdae-43dd-1cdd-bda51ccb9118}">
           <p14:sldIdLst>
             <p14:sldId id="270"/>
           </p14:sldIdLst>
@@ -3277,7 +3277,7 @@
           </p:nvPr>
         </p:nvGraphicFramePr>
         <p:xfrm>
-          <a:off x="1522476" y="2143760"/>
+          <a:off x="1522476" y="2188210"/>
           <a:ext cx="9144000" cy="914400"/>
         </p:xfrm>
         <a:graphic>
@@ -3288,7 +3288,7 @@
                 <a:gridCol w="2286000"/>
                 <a:gridCol w="6858000"/>
               </a:tblGrid>
-              <a:tr h="568960">
+              <a:tr h="551180">
                 <a:tc>
                   <a:txBody>
                     <a:bodyPr/>
@@ -3426,7 +3426,7 @@
                   </a:tcPr>
                 </a:tc>
               </a:tr>
-              <a:tr h="568960">
+              <a:tr h="551180">
                 <a:tc>
                   <a:txBody>
                     <a:bodyPr/>
@@ -3564,7 +3564,7 @@
                   </a:tcPr>
                 </a:tc>
               </a:tr>
-              <a:tr h="568960">
+              <a:tr h="551180">
                 <a:tc>
                   <a:txBody>
                     <a:bodyPr/>
@@ -3702,7 +3702,7 @@
                   </a:tcPr>
                 </a:tc>
               </a:tr>
-              <a:tr h="568960">
+              <a:tr h="551180">
                 <a:tc>
                   <a:txBody>
                     <a:bodyPr/>
@@ -3840,7 +3840,7 @@
                   </a:tcPr>
                 </a:tc>
               </a:tr>
-              <a:tr h="568960">
+              <a:tr h="551180">
                 <a:tc>
                   <a:txBody>
                     <a:bodyPr/>
@@ -6492,7 +6492,7 @@
           </p:nvPr>
         </p:nvGraphicFramePr>
         <p:xfrm>
-          <a:off x="2208276" y="2526030"/>
+          <a:off x="2208276" y="2552700"/>
           <a:ext cx="7772400" cy="914400"/>
         </p:xfrm>
         <a:graphic>
@@ -6506,7 +6506,7 @@
                 <a:gridCol w="1554480"/>
                 <a:gridCol w="1554480"/>
               </a:tblGrid>
-              <a:tr h="568960">
+              <a:tr h="551180">
                 <a:tc>
                   <a:txBody>
                     <a:bodyPr/>
@@ -6848,7 +6848,7 @@
                   </a:tcPr>
                 </a:tc>
               </a:tr>
-              <a:tr h="568960">
+              <a:tr h="551180">
                 <a:tc>
                   <a:txBody>
                     <a:bodyPr/>
@@ -7190,7 +7190,7 @@
                   </a:tcPr>
                 </a:tc>
               </a:tr>
-              <a:tr h="568960">
+              <a:tr h="551180">
                 <a:tc>
                   <a:txBody>
                     <a:bodyPr/>
@@ -8145,7 +8145,7 @@
           </p:nvPr>
         </p:nvGraphicFramePr>
         <p:xfrm>
-          <a:off x="1979676" y="2346960"/>
+          <a:off x="1979676" y="2385060"/>
           <a:ext cx="8229600" cy="914400"/>
         </p:xfrm>
         <a:graphic>
@@ -8157,7 +8157,7 @@
                 <a:gridCol w="2743200"/>
                 <a:gridCol w="2743200"/>
               </a:tblGrid>
-              <a:tr h="609600">
+              <a:tr h="590550">
                 <a:tc>
                   <a:txBody>
                     <a:bodyPr/>
@@ -8363,7 +8363,7 @@
                   </a:tcPr>
                 </a:tc>
               </a:tr>
-              <a:tr h="609600">
+              <a:tr h="590550">
                 <a:tc>
                   <a:txBody>
                     <a:bodyPr/>
@@ -8569,7 +8569,7 @@
                   </a:tcPr>
                 </a:tc>
               </a:tr>
-              <a:tr h="609600">
+              <a:tr h="590550">
                 <a:tc>
                   <a:txBody>
                     <a:bodyPr/>
@@ -8775,7 +8775,7 @@
                   </a:tcPr>
                 </a:tc>
               </a:tr>
-              <a:tr h="609600">
+              <a:tr h="590550">
                 <a:tc>
                   <a:txBody>
                     <a:bodyPr/>
@@ -9222,7 +9222,7 @@
           </p:nvPr>
         </p:nvGraphicFramePr>
         <p:xfrm>
-          <a:off x="1522476" y="2346960"/>
+          <a:off x="1522476" y="2385060"/>
           <a:ext cx="9144000" cy="914400"/>
         </p:xfrm>
         <a:graphic>
@@ -9234,7 +9234,7 @@
                 <a:gridCol w="2286000"/>
                 <a:gridCol w="2286000"/>
               </a:tblGrid>
-              <a:tr h="609600">
+              <a:tr h="590550">
                 <a:tc>
                   <a:txBody>
                     <a:bodyPr/>
@@ -9440,7 +9440,7 @@
                   </a:tcPr>
                 </a:tc>
               </a:tr>
-              <a:tr h="609600">
+              <a:tr h="590550">
                 <a:tc>
                   <a:txBody>
                     <a:bodyPr/>
@@ -9646,7 +9646,7 @@
                   </a:tcPr>
                 </a:tc>
               </a:tr>
-              <a:tr h="609600">
+              <a:tr h="590550">
                 <a:tc>
                   <a:txBody>
                     <a:bodyPr/>
@@ -9852,7 +9852,7 @@
                   </a:tcPr>
                 </a:tc>
               </a:tr>
-              <a:tr h="609600">
+              <a:tr h="590550">
                 <a:tc>
                   <a:txBody>
                     <a:bodyPr/>
@@ -10497,7 +10497,7 @@
           </p:nvPr>
         </p:nvGraphicFramePr>
         <p:xfrm>
-          <a:off x="608076" y="2810510"/>
+          <a:off x="608076" y="2828290"/>
           <a:ext cx="10972800" cy="914400"/>
         </p:xfrm>
         <a:graphic>
@@ -10515,7 +10515,7 @@
                 <a:gridCol w="1219200"/>
                 <a:gridCol w="1219200"/>
               </a:tblGrid>
-              <a:tr h="568960">
+              <a:tr h="551180">
                 <a:tc>
                   <a:txBody>
                     <a:bodyPr/>
@@ -11129,7 +11129,7 @@
                   </a:tcPr>
                 </a:tc>
               </a:tr>
-              <a:tr h="568960">
+              <a:tr h="551180">
                 <a:tc>
                   <a:txBody>
                     <a:bodyPr/>
@@ -12004,7 +12004,7 @@
           </p:nvPr>
         </p:nvGraphicFramePr>
         <p:xfrm>
-          <a:off x="1065276" y="2526030"/>
+          <a:off x="1065276" y="2552700"/>
           <a:ext cx="10058400" cy="914400"/>
         </p:xfrm>
         <a:graphic>
@@ -12018,7 +12018,7 @@
                 <a:gridCol w="1709928"/>
                 <a:gridCol w="1709928"/>
               </a:tblGrid>
-              <a:tr h="568960">
+              <a:tr h="551180">
                 <a:tc>
                   <a:txBody>
                     <a:bodyPr/>
@@ -12360,7 +12360,7 @@
                   </a:tcPr>
                 </a:tc>
               </a:tr>
-              <a:tr h="568960">
+              <a:tr h="551180">
                 <a:tc>
                   <a:txBody>
                     <a:bodyPr/>
@@ -12691,7 +12691,7 @@
                   </a:tcPr>
                 </a:tc>
               </a:tr>
-              <a:tr h="568960">
+              <a:tr h="551180">
                 <a:tc>
                   <a:txBody>
                     <a:bodyPr/>
@@ -14436,7 +14436,7 @@
           </p:nvPr>
         </p:nvGraphicFramePr>
         <p:xfrm>
-          <a:off x="1522476" y="2283714"/>
+          <a:off x="1522476" y="2310384"/>
           <a:ext cx="9144000" cy="914400"/>
         </p:xfrm>
         <a:graphic>
@@ -14453,7 +14453,7 @@
                 <a:gridCol w="1143000"/>
                 <a:gridCol w="1143000"/>
               </a:tblGrid>
-              <a:tr h="568960">
+              <a:tr h="551180">
                 <a:tc>
                   <a:txBody>
                     <a:bodyPr/>
@@ -14999,7 +14999,7 @@
                   </a:tcPr>
                 </a:tc>
               </a:tr>
-              <a:tr h="568960">
+              <a:tr h="551180">
                 <a:tc>
                   <a:txBody>
                     <a:bodyPr/>
@@ -15545,7 +15545,7 @@
                   </a:tcPr>
                 </a:tc>
               </a:tr>
-              <a:tr h="568960">
+              <a:tr h="551180">
                 <a:tc>
                   <a:txBody>
                     <a:bodyPr/>
